--- a/biostat_pipeline/EarlyPhase_Biostat_Pipeline_Map.pptx
+++ b/biostat_pipeline/EarlyPhase_Biostat_Pipeline_Map.pptx
@@ -3224,7 +3224,7 @@
                 <a:ea typeface="Calibri" pitchFamily="34" charset="-122"/>
                 <a:cs typeface="Calibri" pitchFamily="34" charset="-120"/>
               </a:rPr>
-              <a:t>dataset / TLF code — AI as one side of double-programming</a:t>
+              <a:t>dataset / TLF code: AI as one side of double-programming</a:t>
             </a:r>
             <a:endParaRPr lang="en-US" sz="1100" dirty="0"/>
           </a:p>
@@ -3328,7 +3328,7 @@
                 <a:ea typeface="Calibri" pitchFamily="34" charset="-122"/>
                 <a:cs typeface="Calibri" pitchFamily="34" charset="-120"/>
               </a:rPr>
-              <a:t>validated engine produces the number — LLM out of the path</a:t>
+              <a:t>validated engine produces the number; LLM out of the path</a:t>
             </a:r>
             <a:endParaRPr lang="en-US" sz="1100" dirty="0"/>
           </a:p>
@@ -3381,7 +3381,7 @@
                 <a:ea typeface="Calibri" pitchFamily="34" charset="-122"/>
                 <a:cs typeface="Calibri" pitchFamily="34" charset="-120"/>
               </a:rPr>
-              <a:t>PHI / unblinded never leaves (local frozen model) · every reported number from a validated engine, never an LLM · de-identification unlocks the cloud path (Claude API + BAA, never a consumer seat).</a:t>
+              <a:t>PHI / unblinded never leaves (local frozen model) · every reported number from a validated engine, never an LLM · de-identification unlocks the cloud path (contracted cloud model only).</a:t>
             </a:r>
             <a:endParaRPr lang="en-US" sz="1000" dirty="0"/>
           </a:p>

--- a/biostat_pipeline/EarlyPhase_Biostat_Pipeline_Map.pptx
+++ b/biostat_pipeline/EarlyPhase_Biostat_Pipeline_Map.pptx
@@ -930,7 +930,7 @@
                 <a:ea typeface="Calibri" pitchFamily="34" charset="-122"/>
                 <a:cs typeface="Calibri" pitchFamily="34" charset="-120"/>
               </a:rPr>
-              <a:t>EARLY-PHASE CLINICAL PHARMACOLOGY · BIOSTATISTICS DELIVERABLES PIPELINE · 136 DELIVERABLES</a:t>
+              <a:t>EARLY-PHASE CLINICAL PHARMACOLOGY · BIOSTATISTICS DELIVERABLES PIPELINE · 132 DELIVERABLES · REFERENCE MAP</a:t>
             </a:r>
             <a:endParaRPr lang="en-US" sz="1000" dirty="0"/>
           </a:p>
@@ -3002,7 +3002,7 @@
                 <a:ea typeface="Calibri" pitchFamily="34" charset="-122"/>
                 <a:cs typeface="Calibri" pitchFamily="34" charset="-120"/>
               </a:rPr>
-              <a:t>Hybrid-AI governance track:  </a:t>
+              <a:t>Quality track:  </a:t>
             </a:r>
             <a:pPr indent="0" marL="0">
               <a:buNone/>
@@ -3016,7 +3016,7 @@
                 <a:ea typeface="Calibri" pitchFamily="34" charset="-122"/>
                 <a:cs typeface="Calibri" pitchFamily="34" charset="-120"/>
               </a:rPr>
-              <a:t>data-classification routing · model-freeze records · engine-of-record register · zero-egress attestation   (all stages)</a:t>
+              <a:t>independent double programming · engine-of-record register (software and version) · audit trail (21 CFR Part 11) · named sign-off   (all stages)</a:t>
             </a:r>
             <a:endParaRPr lang="en-US" sz="1050" dirty="0"/>
           </a:p>
@@ -3062,7 +3062,7 @@
             <a:avLst/>
           </a:prstGeom>
           <a:solidFill>
-            <a:srgbClr val="0F9D6E"/>
+            <a:srgbClr val="0E7C86"/>
           </a:solidFill>
           <a:ln/>
         </p:spPr>
@@ -3103,7 +3103,7 @@
                 <a:ea typeface="Calibri" pitchFamily="34" charset="-122"/>
                 <a:cs typeface="Calibri" pitchFamily="34" charset="-120"/>
               </a:rPr>
-              <a:t>🟢 GREEN · 48  </a:t>
+              <a:t>Double programming  </a:t>
             </a:r>
             <a:pPr indent="0" marL="0">
               <a:lnSpc>
@@ -3120,7 +3120,7 @@
                 <a:ea typeface="Calibri" pitchFamily="34" charset="-122"/>
                 <a:cs typeface="Calibri" pitchFamily="34" charset="-120"/>
               </a:rPr>
-              <a:t>drafts, scaffolds, docs (de-identified)</a:t>
+              <a:t>every submission-grade output: an independent second program and a logged reconciliation</a:t>
             </a:r>
             <a:endParaRPr lang="en-US" sz="1100" dirty="0"/>
           </a:p>
@@ -3166,7 +3166,7 @@
             <a:avLst/>
           </a:prstGeom>
           <a:solidFill>
-            <a:srgbClr val="C2891C"/>
+            <a:srgbClr val="2F6DB5"/>
           </a:solidFill>
           <a:ln/>
         </p:spPr>
@@ -3207,7 +3207,7 @@
                 <a:ea typeface="Calibri" pitchFamily="34" charset="-122"/>
                 <a:cs typeface="Calibri" pitchFamily="34" charset="-120"/>
               </a:rPr>
-              <a:t>🟡 AMBER · 54  </a:t>
+              <a:t>Validated engines  </a:t>
             </a:r>
             <a:pPr indent="0" marL="0">
               <a:lnSpc>
@@ -3224,7 +3224,7 @@
                 <a:ea typeface="Calibri" pitchFamily="34" charset="-122"/>
                 <a:cs typeface="Calibri" pitchFamily="34" charset="-120"/>
               </a:rPr>
-              <a:t>dataset / TLF code: AI as one side of double-programming</a:t>
+              <a:t>reported numbers from validated SAS/R programs; NCA from Phoenix WinNonlin or PKNCA</a:t>
             </a:r>
             <a:endParaRPr lang="en-US" sz="1100" dirty="0"/>
           </a:p>
@@ -3270,7 +3270,7 @@
             <a:avLst/>
           </a:prstGeom>
           <a:solidFill>
-            <a:srgbClr val="B5564B"/>
+            <a:srgbClr val="4338CA"/>
           </a:solidFill>
           <a:ln/>
         </p:spPr>
@@ -3311,7 +3311,7 @@
                 <a:ea typeface="Calibri" pitchFamily="34" charset="-122"/>
                 <a:cs typeface="Calibri" pitchFamily="34" charset="-120"/>
               </a:rPr>
-              <a:t>🔴 RED · 34  </a:t>
+              <a:t>Named sign-off  </a:t>
             </a:r>
             <a:pPr indent="0" marL="0">
               <a:lnSpc>
@@ -3328,7 +3328,7 @@
                 <a:ea typeface="Calibri" pitchFamily="34" charset="-122"/>
                 <a:cs typeface="Calibri" pitchFamily="34" charset="-120"/>
               </a:rPr>
-              <a:t>validated engine produces the number; LLM out of the path</a:t>
+              <a:t>a qualified statistician reviews and signs each deliverable</a:t>
             </a:r>
             <a:endParaRPr lang="en-US" sz="1100" dirty="0"/>
           </a:p>
@@ -3367,7 +3367,7 @@
                 <a:ea typeface="Calibri" pitchFamily="34" charset="-122"/>
                 <a:cs typeface="Calibri" pitchFamily="34" charset="-120"/>
               </a:rPr>
-              <a:t>3 hard rules:  </a:t>
+              <a:t>Reference map, not a track record:  </a:t>
             </a:r>
             <a:pPr indent="0" marL="0">
               <a:buNone/>
@@ -3381,7 +3381,7 @@
                 <a:ea typeface="Calibri" pitchFamily="34" charset="-122"/>
                 <a:cs typeface="Calibri" pitchFamily="34" charset="-120"/>
               </a:rPr>
-              <a:t>PHI / unblinded never leaves (local frozen model) · every reported number from a validated engine, never an LLM · de-identification unlocks the cloud path (contracted cloud model only).</a:t>
+              <a:t>how each deliverable would be produced and checked. A proposal for AI-assisted drafting under controls is an appendix to the reference document.</a:t>
             </a:r>
             <a:endParaRPr lang="en-US" sz="1000" dirty="0"/>
           </a:p>
@@ -3420,7 +3420,7 @@
                 <a:ea typeface="Calibri" pitchFamily="34" charset="-122"/>
                 <a:cs typeface="Calibri" pitchFamily="34" charset="-120"/>
               </a:rPr>
-              <a:t>136 deliverables across 5 stages · full register with every field = the .xlsx · stage-by-stage detail = the Word/PDF reference · standards current mid-2026 (CDISC SDTMIG v3.4 / ADaMIG v1.3 / Define-XML v2.1; ICH E3·E6(R3)·E9(R1)·M11; 21 CFR Part 11).</a:t>
+              <a:t>132 deliverables across 5 stages · full register with every field = the .xlsx · stage-by-stage detail = the Word/PDF reference · standards as of October 2026 (CDISC SDTMIG v3.4 / ADaMIG v1.3 / Define-XML v2.1; ICH E3·E6(R3)·E9(R1)·M11; 21 CFR Part 11).</a:t>
             </a:r>
             <a:endParaRPr lang="en-US" sz="800" dirty="0"/>
           </a:p>
